--- a/FINAL_slide8.pptx
+++ b/FINAL_slide8.pptx
@@ -1795,9 +1795,8 @@
       </c:txPr>
     </c:legend>
     <c:plotVisOnly val="1"/>
-    <c:dispBlanksAs val="gap"/>
+    <c:dispBlanksAs val="span"/>
     <c:showDLblsOverMax val="0"/>
-    <c:dispBlanksAs val="span"/>
   </c:chart>
   <c:txPr>
     <a:bodyPr/>
